--- a/dist/초1/국어/한글/초1_국어_한글_01_기본모음.pptx
+++ b/dist/초1/국어/한글/초1_국어_한글_01_기본모음.pptx
@@ -120,20 +120,20 @@
   <p:extLst>
     <p:ext uri="{521415D9-36F7-43E2-AB2F-B90AF26B5E84}">
       <p14:sectionLst xmlns:p14="http://schemas.microsoft.com/office/powerpoint/2010/main">
-        <p14:section name="도입" id="{55e72f5e-75e7-bc14-e391-87fa1a2b7189}">
+        <p14:section name="도입" id="{d9bfd5a7-e589-ec33-8935-880fee19969b}">
           <p14:sldIdLst>
             <p14:sldId id="256"/>
             <p14:sldId id="257"/>
           </p14:sldIdLst>
         </p14:section>
-        <p14:section name="개념" id="{23d946be-1aab-b45f-ba08-c3cf3254b033}">
+        <p14:section name="개념" id="{b58cccc7-1eb9-6434-f6a6-c304dd1bdfb6}">
           <p14:sldIdLst>
             <p14:sldId id="258"/>
             <p14:sldId id="259"/>
             <p14:sldId id="260"/>
           </p14:sldIdLst>
         </p14:section>
-        <p14:section name="연습" id="{5223cdea-ba24-2270-4c07-07d8ae448466}">
+        <p14:section name="연습" id="{f38f1b16-ffe4-199f-23bc-c3a601f359c5}">
           <p14:sldIdLst>
             <p14:sldId id="261"/>
             <p14:sldId id="262"/>
@@ -141,19 +141,19 @@
             <p14:sldId id="264"/>
           </p14:sldIdLst>
         </p14:section>
-        <p14:section name="확인" id="{16662bf6-17c1-7476-84fb-15d5f95c04af}">
+        <p14:section name="확인" id="{e0712e71-6b09-fc58-c198-b3edc383d2b7}">
           <p14:sldIdLst>
             <p14:sldId id="265"/>
             <p14:sldId id="266"/>
             <p14:sldId id="267"/>
           </p14:sldIdLst>
         </p14:section>
-        <p14:section name="정리" id="{a2efa506-d06c-912f-51a8-1b6574daeb72}">
+        <p14:section name="정리" id="{01c3a449-bf8d-ce01-a776-69b3eb481507}">
           <p14:sldIdLst>
             <p14:sldId id="268"/>
           </p14:sldIdLst>
         </p14:section>
-        <p14:section name="보충" id="{dfd4ab37-b6ab-0d4b-0c19-c0cd8893a3d2}">
+        <p14:section name="보충" id="{cedf9a3e-eec9-24ca-1ad7-8981e36644ad}">
           <p14:sldIdLst>
             <p14:sldId id="269"/>
           </p14:sldIdLst>
@@ -1870,7 +1870,8 @@
 - ④ ㅠ: ㅡ → 왼쪽 막대 → 오른쪽 막대 [유]
 막히면
 - S08의 ㅏ, ㅓ, ㅗ, ㅜ를 먼저 한 번 더 쓰고, 짧은 막대를 하나씩 더하게 합니다.
-- 활동지 글자를 손가락으로 먼저 덧그린 뒤 연필로 씁니다.</a:t>
+- 활동지 글자를 손가락으로 먼저 덧그린 뒤 연필로 씁니다.
+- 활동지 글자가 작게 느껴지면 부모가 빈 종이에 크게 써 주고 따라 쓰게 합니다.</a:t>
             </a:r>
             <a:endParaRPr lang="en-US" dirty="0"/>
           </a:p>

--- a/dist/초1/국어/한글/초1_국어_한글_01_기본모음.pptx
+++ b/dist/초1/국어/한글/초1_국어_한글_01_기본모음.pptx
@@ -120,20 +120,20 @@
   <p:extLst>
     <p:ext uri="{521415D9-36F7-43E2-AB2F-B90AF26B5E84}">
       <p14:sectionLst xmlns:p14="http://schemas.microsoft.com/office/powerpoint/2010/main">
-        <p14:section name="도입" id="{d9bfd5a7-e589-ec33-8935-880fee19969b}">
+        <p14:section name="도입" id="{37b3efaa-9751-c9e7-1b76-3e762ce4858c}">
           <p14:sldIdLst>
             <p14:sldId id="256"/>
             <p14:sldId id="257"/>
           </p14:sldIdLst>
         </p14:section>
-        <p14:section name="개념" id="{b58cccc7-1eb9-6434-f6a6-c304dd1bdfb6}">
+        <p14:section name="개념" id="{020f0796-161f-5a3c-506f-d84be2dcf41f}">
           <p14:sldIdLst>
             <p14:sldId id="258"/>
             <p14:sldId id="259"/>
             <p14:sldId id="260"/>
           </p14:sldIdLst>
         </p14:section>
-        <p14:section name="연습" id="{f38f1b16-ffe4-199f-23bc-c3a601f359c5}">
+        <p14:section name="연습" id="{2c17ad14-f79d-4a61-634b-4a0135196351}">
           <p14:sldIdLst>
             <p14:sldId id="261"/>
             <p14:sldId id="262"/>
@@ -141,19 +141,19 @@
             <p14:sldId id="264"/>
           </p14:sldIdLst>
         </p14:section>
-        <p14:section name="확인" id="{e0712e71-6b09-fc58-c198-b3edc383d2b7}">
+        <p14:section name="확인" id="{c484fffe-8018-8479-6054-30068b75edf3}">
           <p14:sldIdLst>
             <p14:sldId id="265"/>
             <p14:sldId id="266"/>
             <p14:sldId id="267"/>
           </p14:sldIdLst>
         </p14:section>
-        <p14:section name="정리" id="{01c3a449-bf8d-ce01-a776-69b3eb481507}">
+        <p14:section name="정리" id="{71aa6037-4950-6a7b-d1e8-8706364b007d}">
           <p14:sldIdLst>
             <p14:sldId id="268"/>
           </p14:sldIdLst>
         </p14:section>
-        <p14:section name="보충" id="{cedf9a3e-eec9-24ca-1ad7-8981e36644ad}">
+        <p14:section name="보충" id="{4bc89471-b5bc-3839-86e1-4fa9f30c5476}">
           <p14:sldIdLst>
             <p14:sldId id="269"/>
           </p14:sldIdLst>
@@ -3466,12 +3466,12 @@
         </p:nvSpPr>
         <p:spPr>
           <a:xfrm>
-            <a:off x="1344168" y="2017776"/>
-            <a:ext cx="1267968" cy="1267968"/>
+            <a:off x="1965960" y="2011680"/>
+            <a:ext cx="1280160" cy="1280160"/>
           </a:xfrm>
           <a:prstGeom prst="roundRect">
             <a:avLst>
-              <a:gd name="adj" fmla="val 10096"/>
+              <a:gd name="adj" fmla="val 10000"/>
             </a:avLst>
           </a:prstGeom>
           <a:solidFill>
@@ -3513,12 +3513,12 @@
         </p:nvSpPr>
         <p:spPr>
           <a:xfrm>
-            <a:off x="2813304" y="2017776"/>
-            <a:ext cx="1267968" cy="1267968"/>
+            <a:off x="3447288" y="2011680"/>
+            <a:ext cx="1280160" cy="1280160"/>
           </a:xfrm>
           <a:prstGeom prst="roundRect">
             <a:avLst>
-              <a:gd name="adj" fmla="val 10096"/>
+              <a:gd name="adj" fmla="val 10000"/>
             </a:avLst>
           </a:prstGeom>
           <a:solidFill>
@@ -3560,12 +3560,12 @@
         </p:nvSpPr>
         <p:spPr>
           <a:xfrm>
-            <a:off x="4282440" y="2017776"/>
-            <a:ext cx="1267968" cy="1267968"/>
+            <a:off x="4928616" y="2011680"/>
+            <a:ext cx="1280160" cy="1280160"/>
           </a:xfrm>
           <a:prstGeom prst="roundRect">
             <a:avLst>
-              <a:gd name="adj" fmla="val 10096"/>
+              <a:gd name="adj" fmla="val 10000"/>
             </a:avLst>
           </a:prstGeom>
           <a:solidFill>
@@ -3654,12 +3654,12 @@
         </p:nvSpPr>
         <p:spPr>
           <a:xfrm>
-            <a:off x="1344168" y="3480816"/>
-            <a:ext cx="1267968" cy="1267968"/>
+            <a:off x="1965960" y="3474720"/>
+            <a:ext cx="1280160" cy="1280160"/>
           </a:xfrm>
           <a:prstGeom prst="roundRect">
             <a:avLst>
-              <a:gd name="adj" fmla="val 10096"/>
+              <a:gd name="adj" fmla="val 10000"/>
             </a:avLst>
           </a:prstGeom>
           <a:solidFill>
@@ -3701,12 +3701,12 @@
         </p:nvSpPr>
         <p:spPr>
           <a:xfrm>
-            <a:off x="2813304" y="3480816"/>
-            <a:ext cx="1267968" cy="1267968"/>
+            <a:off x="3447288" y="3474720"/>
+            <a:ext cx="1280160" cy="1280160"/>
           </a:xfrm>
           <a:prstGeom prst="roundRect">
             <a:avLst>
-              <a:gd name="adj" fmla="val 10096"/>
+              <a:gd name="adj" fmla="val 10000"/>
             </a:avLst>
           </a:prstGeom>
           <a:solidFill>
@@ -3748,12 +3748,12 @@
         </p:nvSpPr>
         <p:spPr>
           <a:xfrm>
-            <a:off x="4282440" y="3480816"/>
-            <a:ext cx="1267968" cy="1267968"/>
+            <a:off x="4928616" y="3474720"/>
+            <a:ext cx="1280160" cy="1280160"/>
           </a:xfrm>
           <a:prstGeom prst="roundRect">
             <a:avLst>
-              <a:gd name="adj" fmla="val 10096"/>
+              <a:gd name="adj" fmla="val 10000"/>
             </a:avLst>
           </a:prstGeom>
           <a:solidFill>
@@ -6319,7 +6319,7 @@
         </p:nvSpPr>
         <p:spPr>
           <a:xfrm>
-            <a:off x="2807208" y="2011680"/>
+            <a:off x="2987802" y="2011680"/>
             <a:ext cx="1280160" cy="1280160"/>
           </a:xfrm>
           <a:prstGeom prst="roundRect">
@@ -6413,7 +6413,7 @@
         </p:nvSpPr>
         <p:spPr>
           <a:xfrm>
-            <a:off x="2807208" y="3474720"/>
+            <a:off x="2987802" y="3474720"/>
             <a:ext cx="1280160" cy="1280160"/>
           </a:xfrm>
           <a:prstGeom prst="roundRect">
@@ -6507,7 +6507,7 @@
         </p:nvSpPr>
         <p:spPr>
           <a:xfrm>
-            <a:off x="2807208" y="4937760"/>
+            <a:off x="2987802" y="4937760"/>
             <a:ext cx="1280160" cy="1280160"/>
           </a:xfrm>
           <a:prstGeom prst="roundRect">
@@ -10134,7 +10134,7 @@
         </p:nvSpPr>
         <p:spPr>
           <a:xfrm>
-            <a:off x="2761488" y="2057400"/>
+            <a:off x="2942082" y="2057400"/>
             <a:ext cx="1371600" cy="1371600"/>
           </a:xfrm>
           <a:prstGeom prst="roundRect">
@@ -10228,7 +10228,7 @@
         </p:nvSpPr>
         <p:spPr>
           <a:xfrm>
-            <a:off x="8490204" y="2057400"/>
+            <a:off x="8670798" y="2057400"/>
             <a:ext cx="1371600" cy="1371600"/>
           </a:xfrm>
           <a:prstGeom prst="roundRect">
@@ -10322,7 +10322,7 @@
         </p:nvSpPr>
         <p:spPr>
           <a:xfrm>
-            <a:off x="2761488" y="3703320"/>
+            <a:off x="2942082" y="3703320"/>
             <a:ext cx="1371600" cy="1371600"/>
           </a:xfrm>
           <a:prstGeom prst="roundRect">
@@ -10416,7 +10416,7 @@
         </p:nvSpPr>
         <p:spPr>
           <a:xfrm>
-            <a:off x="8490204" y="3703320"/>
+            <a:off x="8670798" y="3703320"/>
             <a:ext cx="1371600" cy="1371600"/>
           </a:xfrm>
           <a:prstGeom prst="roundRect">

--- a/dist/초1/국어/한글/초1_국어_한글_01_기본모음.pptx
+++ b/dist/초1/국어/한글/초1_국어_한글_01_기본모음.pptx
@@ -120,20 +120,20 @@
   <p:extLst>
     <p:ext uri="{521415D9-36F7-43E2-AB2F-B90AF26B5E84}">
       <p14:sectionLst xmlns:p14="http://schemas.microsoft.com/office/powerpoint/2010/main">
-        <p14:section name="도입" id="{37b3efaa-9751-c9e7-1b76-3e762ce4858c}">
+        <p14:section name="도입" id="{d8c2262e-e5f2-69ed-c1fc-8c10506c1747}">
           <p14:sldIdLst>
             <p14:sldId id="256"/>
             <p14:sldId id="257"/>
           </p14:sldIdLst>
         </p14:section>
-        <p14:section name="개념" id="{020f0796-161f-5a3c-506f-d84be2dcf41f}">
+        <p14:section name="개념" id="{9f8316af-918c-fb33-8784-859c44c1b805}">
           <p14:sldIdLst>
             <p14:sldId id="258"/>
             <p14:sldId id="259"/>
             <p14:sldId id="260"/>
           </p14:sldIdLst>
         </p14:section>
-        <p14:section name="연습" id="{2c17ad14-f79d-4a61-634b-4a0135196351}">
+        <p14:section name="연습" id="{178e060c-c382-1f70-d4fa-ceebc71c417d}">
           <p14:sldIdLst>
             <p14:sldId id="261"/>
             <p14:sldId id="262"/>
@@ -141,19 +141,19 @@
             <p14:sldId id="264"/>
           </p14:sldIdLst>
         </p14:section>
-        <p14:section name="확인" id="{c484fffe-8018-8479-6054-30068b75edf3}">
+        <p14:section name="확인" id="{a06cc230-01bf-d4d7-8250-99dae29f9ad1}">
           <p14:sldIdLst>
             <p14:sldId id="265"/>
             <p14:sldId id="266"/>
             <p14:sldId id="267"/>
           </p14:sldIdLst>
         </p14:section>
-        <p14:section name="정리" id="{71aa6037-4950-6a7b-d1e8-8706364b007d}">
+        <p14:section name="정리" id="{e6397faa-a787-f16d-88d6-3326459fb16d}">
           <p14:sldIdLst>
             <p14:sldId id="268"/>
           </p14:sldIdLst>
         </p14:section>
-        <p14:section name="보충" id="{4bc89471-b5bc-3839-86e1-4fa9f30c5476}">
+        <p14:section name="보충" id="{ddf76977-6cfa-a632-9186-f0ce4a5eaec2}">
           <p14:sldIdLst>
             <p14:sldId id="269"/>
           </p14:sldIdLst>
@@ -9613,7 +9613,7 @@
         </p:nvSpPr>
         <p:spPr>
           <a:xfrm>
-            <a:off x="548640" y="2784348"/>
+            <a:off x="548640" y="2562860"/>
             <a:ext cx="548640" cy="548640"/>
           </a:xfrm>
           <a:prstGeom prst="ellipse">
@@ -9658,7 +9658,7 @@
         </p:nvSpPr>
         <p:spPr>
           <a:xfrm>
-            <a:off x="1325880" y="2784348"/>
+            <a:off x="1325880" y="2562860"/>
             <a:ext cx="5229271" cy="548640"/>
           </a:xfrm>
           <a:prstGeom prst="rect">
@@ -9697,7 +9697,7 @@
         </p:nvSpPr>
         <p:spPr>
           <a:xfrm>
-            <a:off x="548640" y="3497580"/>
+            <a:off x="548640" y="3321812"/>
             <a:ext cx="548640" cy="548640"/>
           </a:xfrm>
           <a:prstGeom prst="ellipse">
@@ -9742,8 +9742,8 @@
         </p:nvSpPr>
         <p:spPr>
           <a:xfrm>
-            <a:off x="1325880" y="3497580"/>
-            <a:ext cx="5229271" cy="548640"/>
+            <a:off x="1325880" y="3276092"/>
+            <a:ext cx="5229271" cy="991616"/>
           </a:xfrm>
           <a:prstGeom prst="rect">
             <a:avLst/>
@@ -9781,7 +9781,7 @@
         </p:nvSpPr>
         <p:spPr>
           <a:xfrm>
-            <a:off x="548640" y="4210812"/>
+            <a:off x="548640" y="4432300"/>
             <a:ext cx="548640" cy="548640"/>
           </a:xfrm>
           <a:prstGeom prst="ellipse">
@@ -9826,7 +9826,7 @@
         </p:nvSpPr>
         <p:spPr>
           <a:xfrm>
-            <a:off x="1325880" y="4210812"/>
+            <a:off x="1325880" y="4432300"/>
             <a:ext cx="5229271" cy="548640"/>
           </a:xfrm>
           <a:prstGeom prst="rect">
